--- a/docs/final/RaktSetu_Presentation.pptx
+++ b/docs/final/RaktSetu_Presentation.pptx
@@ -2659,7 +2659,7 @@
                   <a:schemeClr val="bg1"/>
                 </a:solidFill>
               </a:rPr>
-              <a:t>Pritika Khandelwal · R037</a:t>
+              <a:t>Pritika Khandelwal</a:t>
             </a:r>
             <a:endParaRPr lang="en-US" sz="1400" dirty="0"/>
           </a:p>
